--- a/MVP Risk Template.pptx
+++ b/MVP Risk Template.pptx
@@ -7,6 +7,7 @@
   <p:sldIdLst>
     <p:sldId id="256" r:id="rId2"/>
     <p:sldId id="257" r:id="rId3"/>
+    <p:sldId id="258" r:id="rId4"/>
   </p:sldIdLst>
   <p:sldSz cx="12192000" cy="6858000"/>
   <p:notesSz cx="6858000" cy="9144000"/>
@@ -292,7 +293,7 @@
             <a:fld id="{87DE6118-2437-4B30-8E3C-4D2BE6020583}" type="datetimeFigureOut">
               <a:rPr lang="en-US" dirty="0"/>
               <a:pPr/>
-              <a:t>3/10/2026</a:t>
+              <a:t>3/20/2026</a:t>
             </a:fld>
             <a:endParaRPr lang="en-US"/>
           </a:p>
@@ -632,7 +633,7 @@
           <a:p>
             <a:fld id="{87DE6118-2437-4B30-8E3C-4D2BE6020583}" type="datetimeFigureOut">
               <a:rPr lang="en-US" dirty="0"/>
-              <a:t>3/10/2026</a:t>
+              <a:t>3/20/2026</a:t>
             </a:fld>
             <a:endParaRPr lang="en-US"/>
           </a:p>
@@ -807,7 +808,7 @@
           <a:p>
             <a:fld id="{87DE6118-2437-4B30-8E3C-4D2BE6020583}" type="datetimeFigureOut">
               <a:rPr lang="en-US" dirty="0"/>
-              <a:t>3/10/2026</a:t>
+              <a:t>3/20/2026</a:t>
             </a:fld>
             <a:endParaRPr lang="en-US"/>
           </a:p>
@@ -972,7 +973,7 @@
           <a:p>
             <a:fld id="{87DE6118-2437-4B30-8E3C-4D2BE6020583}" type="datetimeFigureOut">
               <a:rPr lang="en-US" dirty="0"/>
-              <a:t>3/10/2026</a:t>
+              <a:t>3/20/2026</a:t>
             </a:fld>
             <a:endParaRPr lang="en-US"/>
           </a:p>
@@ -1245,7 +1246,7 @@
             <a:fld id="{87DE6118-2437-4B30-8E3C-4D2BE6020583}" type="datetimeFigureOut">
               <a:rPr lang="en-US" dirty="0"/>
               <a:pPr/>
-              <a:t>3/10/2026</a:t>
+              <a:t>3/20/2026</a:t>
             </a:fld>
             <a:endParaRPr lang="en-US"/>
           </a:p>
@@ -1635,7 +1636,7 @@
           <a:p>
             <a:fld id="{87DE6118-2437-4B30-8E3C-4D2BE6020583}" type="datetimeFigureOut">
               <a:rPr lang="en-US" dirty="0"/>
-              <a:t>3/10/2026</a:t>
+              <a:t>3/20/2026</a:t>
             </a:fld>
             <a:endParaRPr lang="en-US"/>
           </a:p>
@@ -2107,7 +2108,7 @@
           <a:p>
             <a:fld id="{87DE6118-2437-4B30-8E3C-4D2BE6020583}" type="datetimeFigureOut">
               <a:rPr lang="en-US" dirty="0"/>
-              <a:t>3/10/2026</a:t>
+              <a:t>3/20/2026</a:t>
             </a:fld>
             <a:endParaRPr lang="en-US"/>
           </a:p>
@@ -2220,7 +2221,7 @@
           <a:p>
             <a:fld id="{87DE6118-2437-4B30-8E3C-4D2BE6020583}" type="datetimeFigureOut">
               <a:rPr lang="en-US" dirty="0"/>
-              <a:t>3/10/2026</a:t>
+              <a:t>3/20/2026</a:t>
             </a:fld>
             <a:endParaRPr lang="en-US"/>
           </a:p>
@@ -2310,7 +2311,7 @@
           <a:p>
             <a:fld id="{87DE6118-2437-4B30-8E3C-4D2BE6020583}" type="datetimeFigureOut">
               <a:rPr lang="en-US" dirty="0"/>
-              <a:t>3/10/2026</a:t>
+              <a:t>3/20/2026</a:t>
             </a:fld>
             <a:endParaRPr lang="en-US"/>
           </a:p>
@@ -2652,7 +2653,7 @@
             <a:fld id="{87DE6118-2437-4B30-8E3C-4D2BE6020583}" type="datetimeFigureOut">
               <a:rPr lang="en-US" dirty="0"/>
               <a:pPr/>
-              <a:t>3/10/2026</a:t>
+              <a:t>3/20/2026</a:t>
             </a:fld>
             <a:endParaRPr lang="en-US"/>
           </a:p>
@@ -3037,7 +3038,7 @@
             <a:fld id="{87DE6118-2437-4B30-8E3C-4D2BE6020583}" type="datetimeFigureOut">
               <a:rPr lang="en-US" dirty="0"/>
               <a:pPr/>
-              <a:t>3/10/2026</a:t>
+              <a:t>3/20/2026</a:t>
             </a:fld>
             <a:endParaRPr lang="en-US"/>
           </a:p>
@@ -3312,7 +3313,7 @@
             <a:fld id="{87DE6118-2437-4B30-8E3C-4D2BE6020583}" type="datetimeFigureOut">
               <a:rPr lang="en-US" dirty="0"/>
               <a:pPr/>
-              <a:t>3/10/2026</a:t>
+              <a:t>3/20/2026</a:t>
             </a:fld>
             <a:endParaRPr lang="en-US"/>
           </a:p>
@@ -4950,7 +4951,7 @@
         <p:spPr>
           <a:xfrm>
             <a:off x="832994" y="4980191"/>
-            <a:ext cx="5701748" cy="2123658"/>
+            <a:ext cx="5701748" cy="1815882"/>
           </a:xfrm>
           <a:prstGeom prst="rect">
             <a:avLst/>
@@ -4971,8 +4972,25 @@
                 <a:latin typeface="Arial"/>
                 <a:cs typeface="Arial"/>
               </a:rPr>
-              <a:t>Risk Score = Likelihood x Impact = 15 x 15 = 225 </a:t>
-            </a:r>
+              <a:t>Risk Score = Likelihood x Impact </a:t>
+            </a:r>
+            <a:r>
+              <a:rPr lang="en-GB" sz="2000" b="1">
+                <a:solidFill>
+                  <a:srgbClr val="FF0000"/>
+                </a:solidFill>
+                <a:latin typeface="Arial"/>
+                <a:cs typeface="Arial"/>
+              </a:rPr>
+              <a:t>= 75</a:t>
+            </a:r>
+            <a:endParaRPr lang="en-GB" sz="2000" b="1" dirty="0">
+              <a:solidFill>
+                <a:srgbClr val="FF0000"/>
+              </a:solidFill>
+              <a:latin typeface="Arial"/>
+              <a:cs typeface="Arial"/>
+            </a:endParaRPr>
           </a:p>
           <a:p>
             <a:endParaRPr lang="en-GB" sz="2000" b="1" dirty="0">
@@ -5031,7 +5049,7 @@
           <p:nvPr>
             <p:extLst>
               <p:ext uri="{D42A27DB-BD31-4B8C-83A1-F6EECF244321}">
-                <p14:modId xmlns:p14="http://schemas.microsoft.com/office/powerpoint/2010/main" val="3566264793"/>
+                <p14:modId xmlns:p14="http://schemas.microsoft.com/office/powerpoint/2010/main" val="3668676447"/>
               </p:ext>
             </p:extLst>
           </p:nvPr>
@@ -5370,7 +5388,7 @@
                     <a:p>
                       <a:r>
                         <a:rPr lang="en-US" dirty="0"/>
-                        <a:t>7</a:t>
+                        <a:t>12</a:t>
                       </a:r>
                     </a:p>
                   </a:txBody>
@@ -5474,7 +5492,7 @@
                     <a:p>
                       <a:r>
                         <a:rPr lang="en-US" dirty="0"/>
-                        <a:t>5</a:t>
+                        <a:t>6</a:t>
                       </a:r>
                     </a:p>
                   </a:txBody>
@@ -5552,7 +5570,7 @@
                     <a:p>
                       <a:r>
                         <a:rPr lang="en-US" dirty="0"/>
-                        <a:t>4</a:t>
+                        <a:t>2</a:t>
                       </a:r>
                     </a:p>
                   </a:txBody>
@@ -5565,7 +5583,7 @@
                     <a:p>
                       <a:r>
                         <a:rPr lang="en-US" dirty="0"/>
-                        <a:t>1</a:t>
+                        <a:t>3</a:t>
                       </a:r>
                     </a:p>
                   </a:txBody>
@@ -5578,7 +5596,7 @@
                     <a:p>
                       <a:r>
                         <a:rPr lang="en-US" dirty="0"/>
-                        <a:t>5</a:t>
+                        <a:t>6</a:t>
                       </a:r>
                     </a:p>
                   </a:txBody>
@@ -5660,7 +5678,7 @@
                     <a:p>
                       <a:r>
                         <a:rPr lang="en-US" dirty="0"/>
-                        <a:t>3</a:t>
+                        <a:t>5</a:t>
                       </a:r>
                     </a:p>
                   </a:txBody>
@@ -5673,7 +5691,7 @@
                     <a:p>
                       <a:r>
                         <a:rPr lang="en-US" dirty="0"/>
-                        <a:t>3</a:t>
+                        <a:t>2</a:t>
                       </a:r>
                     </a:p>
                   </a:txBody>
@@ -5686,7 +5704,7 @@
                     <a:p>
                       <a:r>
                         <a:rPr lang="en-US" dirty="0"/>
-                        <a:t>6</a:t>
+                        <a:t>10</a:t>
                       </a:r>
                     </a:p>
                   </a:txBody>
@@ -5790,7 +5808,7 @@
                     <a:p>
                       <a:r>
                         <a:rPr lang="en-US" dirty="0"/>
-                        <a:t>8</a:t>
+                        <a:t>16</a:t>
                       </a:r>
                     </a:p>
                   </a:txBody>
@@ -5821,7 +5839,7 @@
                     <a:bodyPr/>
                     <a:lstStyle/>
                     <a:p>
-                      <a:endParaRPr lang="en-US"/>
+                      <a:endParaRPr lang="en-US" dirty="0"/>
                     </a:p>
                   </a:txBody>
                   <a:tcPr/>
@@ -5900,6 +5918,417 @@
     <p:extLst>
       <p:ext uri="{BB962C8B-B14F-4D97-AF65-F5344CB8AC3E}">
         <p14:creationId xmlns:p14="http://schemas.microsoft.com/office/powerpoint/2010/main" val="787148654"/>
+      </p:ext>
+    </p:extLst>
+  </p:cSld>
+  <p:clrMapOvr>
+    <a:masterClrMapping/>
+  </p:clrMapOvr>
+</p:sld>
+</file>
+
+<file path=ppt/slides/slide3.xml><?xml version="1.0" encoding="utf-8"?>
+<p:sld xmlns:a="http://schemas.openxmlformats.org/drawingml/2006/main" xmlns:r="http://schemas.openxmlformats.org/officeDocument/2006/relationships" xmlns:p="http://schemas.openxmlformats.org/presentationml/2006/main">
+  <p:cSld>
+    <p:spTree>
+      <p:nvGrpSpPr>
+        <p:cNvPr id="1" name=""/>
+        <p:cNvGrpSpPr/>
+        <p:nvPr/>
+      </p:nvGrpSpPr>
+      <p:grpSpPr>
+        <a:xfrm>
+          <a:off x="0" y="0"/>
+          <a:ext cx="0" cy="0"/>
+          <a:chOff x="0" y="0"/>
+          <a:chExt cx="0" cy="0"/>
+        </a:xfrm>
+      </p:grpSpPr>
+      <p:sp>
+        <p:nvSpPr>
+          <p:cNvPr id="2" name="Title 1">
+            <a:extLst>
+              <a:ext uri="{FF2B5EF4-FFF2-40B4-BE49-F238E27FC236}">
+                <a16:creationId xmlns:a16="http://schemas.microsoft.com/office/drawing/2014/main" id="{6A0C3083-D1A8-2D54-102A-B453CC17C7F0}"/>
+              </a:ext>
+            </a:extLst>
+          </p:cNvPr>
+          <p:cNvSpPr>
+            <a:spLocks noGrp="1"/>
+          </p:cNvSpPr>
+          <p:nvPr>
+            <p:ph type="title"/>
+          </p:nvPr>
+        </p:nvSpPr>
+        <p:spPr/>
+        <p:txBody>
+          <a:bodyPr/>
+          <a:lstStyle/>
+          <a:p>
+            <a:r>
+              <a:rPr lang="en-GB" b="1" u="sng" dirty="0"/>
+              <a:t>Added Risks</a:t>
+            </a:r>
+          </a:p>
+        </p:txBody>
+      </p:sp>
+      <p:graphicFrame>
+        <p:nvGraphicFramePr>
+          <p:cNvPr id="4" name="Content Placeholder 3">
+            <a:extLst>
+              <a:ext uri="{FF2B5EF4-FFF2-40B4-BE49-F238E27FC236}">
+                <a16:creationId xmlns:a16="http://schemas.microsoft.com/office/drawing/2014/main" id="{27C50CD8-BCC6-48F9-4740-2C1B4DAA7E24}"/>
+              </a:ext>
+            </a:extLst>
+          </p:cNvPr>
+          <p:cNvGraphicFramePr>
+            <a:graphicFrameLocks noGrp="1"/>
+          </p:cNvGraphicFramePr>
+          <p:nvPr>
+            <p:ph idx="1"/>
+            <p:extLst>
+              <p:ext uri="{D42A27DB-BD31-4B8C-83A1-F6EECF244321}">
+                <p14:modId xmlns:p14="http://schemas.microsoft.com/office/powerpoint/2010/main" val="1308243060"/>
+              </p:ext>
+            </p:extLst>
+          </p:nvPr>
+        </p:nvGraphicFramePr>
+        <p:xfrm>
+          <a:off x="1295400" y="1691640"/>
+          <a:ext cx="9601200" cy="3474720"/>
+        </p:xfrm>
+        <a:graphic>
+          <a:graphicData uri="http://schemas.openxmlformats.org/drawingml/2006/table">
+            <a:tbl>
+              <a:tblPr firstRow="1" bandRow="1">
+                <a:tableStyleId>{5C22544A-7EE6-4342-B048-85BDC9FD1C3A}</a:tableStyleId>
+              </a:tblPr>
+              <a:tblGrid>
+                <a:gridCol w="1371600">
+                  <a:extLst>
+                    <a:ext uri="{9D8B030D-6E8A-4147-A177-3AD203B41FA5}">
+                      <a16:colId xmlns:a16="http://schemas.microsoft.com/office/drawing/2014/main" val="1800804049"/>
+                    </a:ext>
+                  </a:extLst>
+                </a:gridCol>
+                <a:gridCol w="1371600">
+                  <a:extLst>
+                    <a:ext uri="{9D8B030D-6E8A-4147-A177-3AD203B41FA5}">
+                      <a16:colId xmlns:a16="http://schemas.microsoft.com/office/drawing/2014/main" val="342713048"/>
+                    </a:ext>
+                  </a:extLst>
+                </a:gridCol>
+                <a:gridCol w="1371600">
+                  <a:extLst>
+                    <a:ext uri="{9D8B030D-6E8A-4147-A177-3AD203B41FA5}">
+                      <a16:colId xmlns:a16="http://schemas.microsoft.com/office/drawing/2014/main" val="955590628"/>
+                    </a:ext>
+                  </a:extLst>
+                </a:gridCol>
+                <a:gridCol w="1371600">
+                  <a:extLst>
+                    <a:ext uri="{9D8B030D-6E8A-4147-A177-3AD203B41FA5}">
+                      <a16:colId xmlns:a16="http://schemas.microsoft.com/office/drawing/2014/main" val="1274357219"/>
+                    </a:ext>
+                  </a:extLst>
+                </a:gridCol>
+                <a:gridCol w="1371600">
+                  <a:extLst>
+                    <a:ext uri="{9D8B030D-6E8A-4147-A177-3AD203B41FA5}">
+                      <a16:colId xmlns:a16="http://schemas.microsoft.com/office/drawing/2014/main" val="3560586923"/>
+                    </a:ext>
+                  </a:extLst>
+                </a:gridCol>
+                <a:gridCol w="1371600">
+                  <a:extLst>
+                    <a:ext uri="{9D8B030D-6E8A-4147-A177-3AD203B41FA5}">
+                      <a16:colId xmlns:a16="http://schemas.microsoft.com/office/drawing/2014/main" val="1419976425"/>
+                    </a:ext>
+                  </a:extLst>
+                </a:gridCol>
+                <a:gridCol w="1371600">
+                  <a:extLst>
+                    <a:ext uri="{9D8B030D-6E8A-4147-A177-3AD203B41FA5}">
+                      <a16:colId xmlns:a16="http://schemas.microsoft.com/office/drawing/2014/main" val="972135009"/>
+                    </a:ext>
+                  </a:extLst>
+                </a:gridCol>
+              </a:tblGrid>
+              <a:tr h="370840">
+                <a:tc>
+                  <a:txBody>
+                    <a:bodyPr/>
+                    <a:lstStyle/>
+                    <a:p>
+                      <a:r>
+                        <a:rPr lang="en-GB" dirty="0"/>
+                        <a:t>Ref ID</a:t>
+                      </a:r>
+                    </a:p>
+                  </a:txBody>
+                  <a:tcPr/>
+                </a:tc>
+                <a:tc>
+                  <a:txBody>
+                    <a:bodyPr/>
+                    <a:lstStyle/>
+                    <a:p>
+                      <a:r>
+                        <a:rPr lang="en-GB" dirty="0"/>
+                        <a:t>Risk</a:t>
+                      </a:r>
+                    </a:p>
+                    <a:p>
+                      <a:r>
+                        <a:rPr lang="en-GB" dirty="0"/>
+                        <a:t>Category</a:t>
+                      </a:r>
+                    </a:p>
+                  </a:txBody>
+                  <a:tcPr/>
+                </a:tc>
+                <a:tc>
+                  <a:txBody>
+                    <a:bodyPr/>
+                    <a:lstStyle/>
+                    <a:p>
+                      <a:r>
+                        <a:rPr lang="en-GB" dirty="0"/>
+                        <a:t>Risk Description/Threat</a:t>
+                      </a:r>
+                    </a:p>
+                  </a:txBody>
+                  <a:tcPr/>
+                </a:tc>
+                <a:tc>
+                  <a:txBody>
+                    <a:bodyPr/>
+                    <a:lstStyle/>
+                    <a:p>
+                      <a:r>
+                        <a:rPr lang="en-GB" dirty="0"/>
+                        <a:t>Likelihood</a:t>
+                      </a:r>
+                    </a:p>
+                    <a:p>
+                      <a:r>
+                        <a:rPr lang="en-GB" dirty="0"/>
+                        <a:t>(1-5)</a:t>
+                      </a:r>
+                    </a:p>
+                  </a:txBody>
+                  <a:tcPr/>
+                </a:tc>
+                <a:tc>
+                  <a:txBody>
+                    <a:bodyPr/>
+                    <a:lstStyle/>
+                    <a:p>
+                      <a:r>
+                        <a:rPr lang="en-GB" dirty="0"/>
+                        <a:t>Impact </a:t>
+                      </a:r>
+                    </a:p>
+                    <a:p>
+                      <a:r>
+                        <a:rPr lang="en-GB" dirty="0"/>
+                        <a:t>(1-5)</a:t>
+                      </a:r>
+                    </a:p>
+                  </a:txBody>
+                  <a:tcPr/>
+                </a:tc>
+                <a:tc>
+                  <a:txBody>
+                    <a:bodyPr/>
+                    <a:lstStyle/>
+                    <a:p>
+                      <a:r>
+                        <a:rPr lang="en-GB" dirty="0"/>
+                        <a:t>Total</a:t>
+                      </a:r>
+                    </a:p>
+                    <a:p>
+                      <a:r>
+                        <a:rPr lang="en-GB" dirty="0"/>
+                        <a:t>Score</a:t>
+                      </a:r>
+                    </a:p>
+                    <a:p>
+                      <a:r>
+                        <a:rPr lang="en-GB" dirty="0"/>
+                        <a:t>(L*1)</a:t>
+                      </a:r>
+                    </a:p>
+                  </a:txBody>
+                  <a:tcPr/>
+                </a:tc>
+                <a:tc>
+                  <a:txBody>
+                    <a:bodyPr/>
+                    <a:lstStyle/>
+                    <a:p>
+                      <a:r>
+                        <a:rPr lang="en-GB" dirty="0"/>
+                        <a:t>Proposed Mitigation for Sprint 2</a:t>
+                      </a:r>
+                    </a:p>
+                  </a:txBody>
+                  <a:tcPr/>
+                </a:tc>
+                <a:extLst>
+                  <a:ext uri="{0D108BD9-81ED-4DB2-BD59-A6C34878D82A}">
+                    <a16:rowId xmlns:a16="http://schemas.microsoft.com/office/drawing/2014/main" val="3072615849"/>
+                  </a:ext>
+                </a:extLst>
+              </a:tr>
+              <a:tr h="370840">
+                <a:tc>
+                  <a:txBody>
+                    <a:bodyPr/>
+                    <a:lstStyle/>
+                    <a:p>
+                      <a:r>
+                        <a:rPr lang="en-GB" dirty="0"/>
+                        <a:t>R06</a:t>
+                      </a:r>
+                    </a:p>
+                  </a:txBody>
+                  <a:tcPr/>
+                </a:tc>
+                <a:tc>
+                  <a:txBody>
+                    <a:bodyPr/>
+                    <a:lstStyle/>
+                    <a:p>
+                      <a:r>
+                        <a:rPr lang="en-GB" dirty="0"/>
+                        <a:t>Software Application Design</a:t>
+                      </a:r>
+                    </a:p>
+                  </a:txBody>
+                  <a:tcPr/>
+                </a:tc>
+                <a:tc>
+                  <a:txBody>
+                    <a:bodyPr/>
+                    <a:lstStyle/>
+                    <a:p>
+                      <a:r>
+                        <a:rPr lang="en-GB" dirty="0"/>
+                        <a:t>Anyone can use anyone’s email to open a support ticket. So no verification.</a:t>
+                      </a:r>
+                    </a:p>
+                  </a:txBody>
+                  <a:tcPr/>
+                </a:tc>
+                <a:tc>
+                  <a:txBody>
+                    <a:bodyPr/>
+                    <a:lstStyle/>
+                    <a:p>
+                      <a:r>
+                        <a:rPr lang="en-GB" dirty="0"/>
+                        <a:t>5</a:t>
+                      </a:r>
+                    </a:p>
+                  </a:txBody>
+                  <a:tcPr/>
+                </a:tc>
+                <a:tc>
+                  <a:txBody>
+                    <a:bodyPr/>
+                    <a:lstStyle/>
+                    <a:p>
+                      <a:r>
+                        <a:rPr lang="en-GB" dirty="0"/>
+                        <a:t>5</a:t>
+                      </a:r>
+                    </a:p>
+                  </a:txBody>
+                  <a:tcPr/>
+                </a:tc>
+                <a:tc>
+                  <a:txBody>
+                    <a:bodyPr/>
+                    <a:lstStyle/>
+                    <a:p>
+                      <a:r>
+                        <a:rPr lang="en-GB" dirty="0"/>
+                        <a:t>25</a:t>
+                      </a:r>
+                    </a:p>
+                  </a:txBody>
+                  <a:tcPr/>
+                </a:tc>
+                <a:tc>
+                  <a:txBody>
+                    <a:bodyPr/>
+                    <a:lstStyle/>
+                    <a:p>
+                      <a:r>
+                        <a:rPr lang="en-GB" dirty="0"/>
+                        <a:t>Work will be done on this and review any more errors like this to avoid in future.</a:t>
+                      </a:r>
+                    </a:p>
+                  </a:txBody>
+                  <a:tcPr/>
+                </a:tc>
+                <a:extLst>
+                  <a:ext uri="{0D108BD9-81ED-4DB2-BD59-A6C34878D82A}">
+                    <a16:rowId xmlns:a16="http://schemas.microsoft.com/office/drawing/2014/main" val="3675641110"/>
+                  </a:ext>
+                </a:extLst>
+              </a:tr>
+            </a:tbl>
+          </a:graphicData>
+        </a:graphic>
+      </p:graphicFrame>
+      <p:sp>
+        <p:nvSpPr>
+          <p:cNvPr id="6" name="TextBox 5">
+            <a:extLst>
+              <a:ext uri="{FF2B5EF4-FFF2-40B4-BE49-F238E27FC236}">
+                <a16:creationId xmlns:a16="http://schemas.microsoft.com/office/drawing/2014/main" id="{5A6A4598-A0C7-A80D-FC33-5E9D14780B3A}"/>
+              </a:ext>
+            </a:extLst>
+          </p:cNvPr>
+          <p:cNvSpPr txBox="1"/>
+          <p:nvPr/>
+        </p:nvSpPr>
+        <p:spPr>
+          <a:xfrm>
+            <a:off x="953729" y="5439386"/>
+            <a:ext cx="6096000" cy="369332"/>
+          </a:xfrm>
+          <a:prstGeom prst="rect">
+            <a:avLst/>
+          </a:prstGeom>
+          <a:noFill/>
+        </p:spPr>
+        <p:txBody>
+          <a:bodyPr wrap="square">
+            <a:spAutoFit/>
+          </a:bodyPr>
+          <a:lstStyle/>
+          <a:p>
+            <a:r>
+              <a:rPr lang="en-GB" sz="1800" b="1" dirty="0">
+                <a:solidFill>
+                  <a:srgbClr val="FF0000"/>
+                </a:solidFill>
+                <a:latin typeface="Arial"/>
+                <a:cs typeface="Arial"/>
+              </a:rPr>
+              <a:t>Risk Score = Likelihood x Impact = 75</a:t>
+            </a:r>
+          </a:p>
+        </p:txBody>
+      </p:sp>
+    </p:spTree>
+    <p:extLst>
+      <p:ext uri="{BB962C8B-B14F-4D97-AF65-F5344CB8AC3E}">
+        <p14:creationId xmlns:p14="http://schemas.microsoft.com/office/powerpoint/2010/main" val="1948989427"/>
       </p:ext>
     </p:extLst>
   </p:cSld>
